--- a/2520030432_CSE.pptx
+++ b/2520030432_CSE.pptx
@@ -8782,41 +8782,30 @@
               <a:t>Supervisor Name: </a:t>
             </a:r>
             <a:r>
-              <a:rPr lang="en-IN" sz="8600" dirty="0" err="1">
+              <a:rPr lang="en-IN" sz="8600">
                 <a:solidFill>
                   <a:srgbClr val="00B050"/>
                 </a:solidFill>
               </a:rPr>
-              <a:t>Tanguturu</a:t>
-            </a:r>
-            <a:r>
-              <a:rPr lang="en-IN" sz="8600" dirty="0">
-                <a:solidFill>
-                  <a:srgbClr val="00B050"/>
-                </a:solidFill>
-              </a:rPr>
-              <a:t> SP Madhuri</a:t>
-            </a:r>
+              <a:t>N Chaitanya Kumar</a:t>
+            </a:r>
+            <a:endParaRPr lang="en-IN" sz="8600" dirty="0">
+              <a:solidFill>
+                <a:srgbClr val="00B050"/>
+              </a:solidFill>
+            </a:endParaRPr>
           </a:p>
           <a:p>
             <a:pPr marL="0" indent="0" algn="ctr">
               <a:buNone/>
             </a:pPr>
-            <a:r>
-              <a:rPr lang="en-US" sz="8600">
-                <a:solidFill>
-                  <a:srgbClr val="00B050"/>
-                </a:solidFill>
-              </a:rPr>
-              <a:t>Assistant </a:t>
-            </a:r>
             <a:r>
               <a:rPr lang="en-US" sz="8600" dirty="0">
                 <a:solidFill>
                   <a:srgbClr val="00B050"/>
                 </a:solidFill>
               </a:rPr>
-              <a:t>Professor</a:t>
+              <a:t>Assistant Professor</a:t>
             </a:r>
           </a:p>
           <a:p>
